--- a/neerlandais1/powerpoints/Module_22_Die_of_dat.pptx
+++ b/neerlandais1/powerpoints/Module_22_Die_of_dat.pptx
@@ -133,18 +133,18 @@
   <p:extLst>
     <p:ext uri="{521415D9-36F7-43E2-AB2F-B90AF26B5E84}">
       <p14:sectionLst xmlns:p14="http://schemas.microsoft.com/office/powerpoint/2010/main">
-        <p14:section name="Ouverture" id="{262cd7e1-3bf5-e8e4-af1a-e11c6d3260d9}">
+        <p14:section name="Ouverture" id="{79454292-8d06-7936-dfbb-9446d00df934}">
           <p14:sldIdLst>
             <p14:sldId id="256"/>
           </p14:sldIdLst>
         </p14:section>
-        <p14:section name="Découvrir" id="{7a1596b4-526d-0c52-c51b-819c7cdfd681}">
+        <p14:section name="Découvrir" id="{64b553ad-f058-99b8-6de4-58063e0bc4a1}">
           <p14:sldIdLst>
             <p14:sldId id="257"/>
             <p14:sldId id="258"/>
           </p14:sldIdLst>
         </p14:section>
-        <p14:section name="Comprendre" id="{a551735d-7bb9-1f2f-fb09-080cf009680b}">
+        <p14:section name="Comprendre" id="{5add7528-173e-98f4-22e0-5e6e348126e4}">
           <p14:sldIdLst>
             <p14:sldId id="259"/>
             <p14:sldId id="260"/>
@@ -158,7 +158,7 @@
             <p14:sldId id="268"/>
           </p14:sldIdLst>
         </p14:section>
-        <p14:section name="JIJ NU ! — Oefeningen" id="{741cfdfb-1e99-b89b-d26f-e6fff2e1b93f}">
+        <p14:section name="JIJ NU ! — Oefeningen" id="{9f012cfe-48c3-ec6b-8c14-7765053dba01}">
           <p14:sldIdLst>
             <p14:sldId id="269"/>
             <p14:sldId id="270"/>
@@ -175,7 +175,7 @@
             <p14:sldId id="281"/>
           </p14:sldIdLst>
         </p14:section>
-        <p14:section name="Clôture" id="{b4100364-3e3b-f1bf-2bb7-f0ef7cf96534}">
+        <p14:section name="Clôture" id="{6e2f6f28-7095-a5c1-4a0b-be6d55b221f3}">
           <p14:sldIdLst>
             <p14:sldId id="282"/>
           </p14:sldIdLst>
@@ -3806,7 +3806,7 @@
                   <a:srgbClr val="FFFFFF"/>
                 </a:solidFill>
               </a:rPr>
-              <a:t>MODULE 22 / 24</a:t>
+              <a:t>MODULE 22 / 29</a:t>
             </a:r>
             <a:endParaRPr lang="en-US" sz="1400" dirty="0"/>
           </a:p>

--- a/neerlandais1/powerpoints/Module_22_Die_of_dat.pptx
+++ b/neerlandais1/powerpoints/Module_22_Die_of_dat.pptx
@@ -133,18 +133,18 @@
   <p:extLst>
     <p:ext uri="{521415D9-36F7-43E2-AB2F-B90AF26B5E84}">
       <p14:sectionLst xmlns:p14="http://schemas.microsoft.com/office/powerpoint/2010/main">
-        <p14:section name="Ouverture" id="{79454292-8d06-7936-dfbb-9446d00df934}">
+        <p14:section name="Ouverture" id="{bdccedac-cf7b-7d65-a117-0d7ed92fd439}">
           <p14:sldIdLst>
             <p14:sldId id="256"/>
           </p14:sldIdLst>
         </p14:section>
-        <p14:section name="Découvrir" id="{64b553ad-f058-99b8-6de4-58063e0bc4a1}">
+        <p14:section name="Découvrir" id="{d1985194-ab2e-890b-4a7e-6679db91851b}">
           <p14:sldIdLst>
             <p14:sldId id="257"/>
             <p14:sldId id="258"/>
           </p14:sldIdLst>
         </p14:section>
-        <p14:section name="Comprendre" id="{5add7528-173e-98f4-22e0-5e6e348126e4}">
+        <p14:section name="Comprendre" id="{83024a17-30bd-66b7-9e2b-683b1a7adaa9}">
           <p14:sldIdLst>
             <p14:sldId id="259"/>
             <p14:sldId id="260"/>
@@ -158,7 +158,7 @@
             <p14:sldId id="268"/>
           </p14:sldIdLst>
         </p14:section>
-        <p14:section name="JIJ NU ! — Oefeningen" id="{9f012cfe-48c3-ec6b-8c14-7765053dba01}">
+        <p14:section name="JIJ NU ! — Oefeningen" id="{39e2a1fb-14eb-8944-be66-8dd2525ccbf3}">
           <p14:sldIdLst>
             <p14:sldId id="269"/>
             <p14:sldId id="270"/>
@@ -175,7 +175,7 @@
             <p14:sldId id="281"/>
           </p14:sldIdLst>
         </p14:section>
-        <p14:section name="Clôture" id="{6e2f6f28-7095-a5c1-4a0b-be6d55b221f3}">
+        <p14:section name="Clôture" id="{8e6fcd83-f293-6623-e9dc-35c2fcaed983}">
           <p14:sldIdLst>
             <p14:sldId id="282"/>
           </p14:sldIdLst>
@@ -3806,7 +3806,7 @@
                   <a:srgbClr val="FFFFFF"/>
                 </a:solidFill>
               </a:rPr>
-              <a:t>MODULE 22 / 29</a:t>
+              <a:t>MODULE 22 / 32</a:t>
             </a:r>
             <a:endParaRPr lang="en-US" sz="1400" dirty="0"/>
           </a:p>

--- a/neerlandais1/powerpoints/Module_22_Die_of_dat.pptx
+++ b/neerlandais1/powerpoints/Module_22_Die_of_dat.pptx
@@ -133,18 +133,18 @@
   <p:extLst>
     <p:ext uri="{521415D9-36F7-43E2-AB2F-B90AF26B5E84}">
       <p14:sectionLst xmlns:p14="http://schemas.microsoft.com/office/powerpoint/2010/main">
-        <p14:section name="Ouverture" id="{bdccedac-cf7b-7d65-a117-0d7ed92fd439}">
+        <p14:section name="Ouverture" id="{09810fbc-f78a-1153-d078-385f84007f26}">
           <p14:sldIdLst>
             <p14:sldId id="256"/>
           </p14:sldIdLst>
         </p14:section>
-        <p14:section name="Découvrir" id="{d1985194-ab2e-890b-4a7e-6679db91851b}">
+        <p14:section name="Découvrir" id="{ce5323b2-06dc-8c3e-c1a1-1e46e2c2df75}">
           <p14:sldIdLst>
             <p14:sldId id="257"/>
             <p14:sldId id="258"/>
           </p14:sldIdLst>
         </p14:section>
-        <p14:section name="Comprendre" id="{83024a17-30bd-66b7-9e2b-683b1a7adaa9}">
+        <p14:section name="Comprendre" id="{3efaa881-fc11-2a11-8357-fb76a9345387}">
           <p14:sldIdLst>
             <p14:sldId id="259"/>
             <p14:sldId id="260"/>
@@ -158,7 +158,7 @@
             <p14:sldId id="268"/>
           </p14:sldIdLst>
         </p14:section>
-        <p14:section name="JIJ NU ! — Oefeningen" id="{39e2a1fb-14eb-8944-be66-8dd2525ccbf3}">
+        <p14:section name="JIJ NU ! — Oefeningen" id="{eb61b24a-ddf6-1ba4-b593-903e2515a4af}">
           <p14:sldIdLst>
             <p14:sldId id="269"/>
             <p14:sldId id="270"/>
@@ -175,7 +175,7 @@
             <p14:sldId id="281"/>
           </p14:sldIdLst>
         </p14:section>
-        <p14:section name="Clôture" id="{8e6fcd83-f293-6623-e9dc-35c2fcaed983}">
+        <p14:section name="Clôture" id="{eb8c81b8-360d-a716-cc52-19737e4d0bbf}">
           <p14:sldIdLst>
             <p14:sldId id="282"/>
           </p14:sldIdLst>

--- a/neerlandais1/powerpoints/Module_22_Die_of_dat.pptx
+++ b/neerlandais1/powerpoints/Module_22_Die_of_dat.pptx
@@ -133,18 +133,18 @@
   <p:extLst>
     <p:ext uri="{521415D9-36F7-43E2-AB2F-B90AF26B5E84}">
       <p14:sectionLst xmlns:p14="http://schemas.microsoft.com/office/powerpoint/2010/main">
-        <p14:section name="Ouverture" id="{09810fbc-f78a-1153-d078-385f84007f26}">
+        <p14:section name="Ouverture" id="{af67c5de-ee4e-2e13-8df5-44b17b2931d1}">
           <p14:sldIdLst>
             <p14:sldId id="256"/>
           </p14:sldIdLst>
         </p14:section>
-        <p14:section name="Découvrir" id="{ce5323b2-06dc-8c3e-c1a1-1e46e2c2df75}">
+        <p14:section name="Découvrir" id="{4f74dd87-ae2a-7dce-04dd-fc078a8213c8}">
           <p14:sldIdLst>
             <p14:sldId id="257"/>
             <p14:sldId id="258"/>
           </p14:sldIdLst>
         </p14:section>
-        <p14:section name="Comprendre" id="{3efaa881-fc11-2a11-8357-fb76a9345387}">
+        <p14:section name="Comprendre" id="{20a84184-dcc7-e4b0-da58-c17b8ff9cee2}">
           <p14:sldIdLst>
             <p14:sldId id="259"/>
             <p14:sldId id="260"/>
@@ -158,7 +158,7 @@
             <p14:sldId id="268"/>
           </p14:sldIdLst>
         </p14:section>
-        <p14:section name="JIJ NU ! — Oefeningen" id="{eb61b24a-ddf6-1ba4-b593-903e2515a4af}">
+        <p14:section name="JIJ NU ! — Oefeningen" id="{c3247e9f-4d51-d496-7523-cd56a700a95a}">
           <p14:sldIdLst>
             <p14:sldId id="269"/>
             <p14:sldId id="270"/>
@@ -175,7 +175,7 @@
             <p14:sldId id="281"/>
           </p14:sldIdLst>
         </p14:section>
-        <p14:section name="Clôture" id="{eb8c81b8-360d-a716-cc52-19737e4d0bbf}">
+        <p14:section name="Clôture" id="{2e5b5103-b311-01af-40e9-3575edfbaaa3}">
           <p14:sldIdLst>
             <p14:sldId id="282"/>
           </p14:sldIdLst>

--- a/neerlandais1/powerpoints/Module_22_Die_of_dat.pptx
+++ b/neerlandais1/powerpoints/Module_22_Die_of_dat.pptx
@@ -133,18 +133,18 @@
   <p:extLst>
     <p:ext uri="{521415D9-36F7-43E2-AB2F-B90AF26B5E84}">
       <p14:sectionLst xmlns:p14="http://schemas.microsoft.com/office/powerpoint/2010/main">
-        <p14:section name="Ouverture" id="{af67c5de-ee4e-2e13-8df5-44b17b2931d1}">
+        <p14:section name="Ouverture" id="{8e4059d1-c1a3-b453-6099-3086f739b5da}">
           <p14:sldIdLst>
             <p14:sldId id="256"/>
           </p14:sldIdLst>
         </p14:section>
-        <p14:section name="Découvrir" id="{4f74dd87-ae2a-7dce-04dd-fc078a8213c8}">
+        <p14:section name="Découvrir" id="{32b320c2-657d-fc9b-0162-30e836272933}">
           <p14:sldIdLst>
             <p14:sldId id="257"/>
             <p14:sldId id="258"/>
           </p14:sldIdLst>
         </p14:section>
-        <p14:section name="Comprendre" id="{20a84184-dcc7-e4b0-da58-c17b8ff9cee2}">
+        <p14:section name="Comprendre" id="{6701d587-42bd-1fe5-44e0-ce8da4231404}">
           <p14:sldIdLst>
             <p14:sldId id="259"/>
             <p14:sldId id="260"/>
@@ -158,7 +158,7 @@
             <p14:sldId id="268"/>
           </p14:sldIdLst>
         </p14:section>
-        <p14:section name="JIJ NU ! — Oefeningen" id="{c3247e9f-4d51-d496-7523-cd56a700a95a}">
+        <p14:section name="JIJ NU ! — Oefeningen" id="{2f501655-e794-7a8c-08b6-732e9d5eb7bf}">
           <p14:sldIdLst>
             <p14:sldId id="269"/>
             <p14:sldId id="270"/>
@@ -175,7 +175,7 @@
             <p14:sldId id="281"/>
           </p14:sldIdLst>
         </p14:section>
-        <p14:section name="Clôture" id="{2e5b5103-b311-01af-40e9-3575edfbaaa3}">
+        <p14:section name="Clôture" id="{bcf66c8a-d240-08f6-5bb6-15628c20cc77}">
           <p14:sldIdLst>
             <p14:sldId id="282"/>
           </p14:sldIdLst>

--- a/neerlandais1/powerpoints/Module_22_Die_of_dat.pptx
+++ b/neerlandais1/powerpoints/Module_22_Die_of_dat.pptx
@@ -133,18 +133,18 @@
   <p:extLst>
     <p:ext uri="{521415D9-36F7-43E2-AB2F-B90AF26B5E84}">
       <p14:sectionLst xmlns:p14="http://schemas.microsoft.com/office/powerpoint/2010/main">
-        <p14:section name="Ouverture" id="{8e4059d1-c1a3-b453-6099-3086f739b5da}">
+        <p14:section name="Ouverture" id="{10885351-c2cd-ecc4-61fc-96bc0bab382e}">
           <p14:sldIdLst>
             <p14:sldId id="256"/>
           </p14:sldIdLst>
         </p14:section>
-        <p14:section name="Découvrir" id="{32b320c2-657d-fc9b-0162-30e836272933}">
+        <p14:section name="Découvrir" id="{8bf3f8af-815c-8f30-aa71-445206e78c8e}">
           <p14:sldIdLst>
             <p14:sldId id="257"/>
             <p14:sldId id="258"/>
           </p14:sldIdLst>
         </p14:section>
-        <p14:section name="Comprendre" id="{6701d587-42bd-1fe5-44e0-ce8da4231404}">
+        <p14:section name="Comprendre" id="{b0e4c0dc-f869-aa7f-e161-b8586f87414f}">
           <p14:sldIdLst>
             <p14:sldId id="259"/>
             <p14:sldId id="260"/>
@@ -158,7 +158,7 @@
             <p14:sldId id="268"/>
           </p14:sldIdLst>
         </p14:section>
-        <p14:section name="JIJ NU ! — Oefeningen" id="{2f501655-e794-7a8c-08b6-732e9d5eb7bf}">
+        <p14:section name="JIJ NU ! — Oefeningen" id="{b7332b34-0840-caf9-daa0-ff2c290ce8dc}">
           <p14:sldIdLst>
             <p14:sldId id="269"/>
             <p14:sldId id="270"/>
@@ -175,7 +175,7 @@
             <p14:sldId id="281"/>
           </p14:sldIdLst>
         </p14:section>
-        <p14:section name="Clôture" id="{bcf66c8a-d240-08f6-5bb6-15628c20cc77}">
+        <p14:section name="Clôture" id="{8127355e-6d6b-78f1-305d-9e9d92b162d7}">
           <p14:sldIdLst>
             <p14:sldId id="282"/>
           </p14:sldIdLst>

--- a/neerlandais1/powerpoints/Module_22_Die_of_dat.pptx
+++ b/neerlandais1/powerpoints/Module_22_Die_of_dat.pptx
@@ -133,18 +133,18 @@
   <p:extLst>
     <p:ext uri="{521415D9-36F7-43E2-AB2F-B90AF26B5E84}">
       <p14:sectionLst xmlns:p14="http://schemas.microsoft.com/office/powerpoint/2010/main">
-        <p14:section name="Ouverture" id="{10885351-c2cd-ecc4-61fc-96bc0bab382e}">
+        <p14:section name="Ouverture" id="{b057ea0e-6b6e-c055-26d2-773aaa533613}">
           <p14:sldIdLst>
             <p14:sldId id="256"/>
           </p14:sldIdLst>
         </p14:section>
-        <p14:section name="Découvrir" id="{8bf3f8af-815c-8f30-aa71-445206e78c8e}">
+        <p14:section name="Découvrir" id="{dc20cea6-cef5-b0bd-02ee-328bb42cd455}">
           <p14:sldIdLst>
             <p14:sldId id="257"/>
             <p14:sldId id="258"/>
           </p14:sldIdLst>
         </p14:section>
-        <p14:section name="Comprendre" id="{b0e4c0dc-f869-aa7f-e161-b8586f87414f}">
+        <p14:section name="Comprendre" id="{6571900b-ab24-95f5-3895-c2d046377fef}">
           <p14:sldIdLst>
             <p14:sldId id="259"/>
             <p14:sldId id="260"/>
@@ -158,7 +158,7 @@
             <p14:sldId id="268"/>
           </p14:sldIdLst>
         </p14:section>
-        <p14:section name="JIJ NU ! — Oefeningen" id="{b7332b34-0840-caf9-daa0-ff2c290ce8dc}">
+        <p14:section name="JIJ NU ! — Oefeningen" id="{2a1fbcfb-2969-89a6-2077-b77bfeb5ac28}">
           <p14:sldIdLst>
             <p14:sldId id="269"/>
             <p14:sldId id="270"/>
@@ -175,7 +175,7 @@
             <p14:sldId id="281"/>
           </p14:sldIdLst>
         </p14:section>
-        <p14:section name="Clôture" id="{8127355e-6d6b-78f1-305d-9e9d92b162d7}">
+        <p14:section name="Clôture" id="{be67e3b6-3163-80d7-f586-977203c652e9}">
           <p14:sldIdLst>
             <p14:sldId id="282"/>
           </p14:sldIdLst>

--- a/neerlandais1/powerpoints/Module_22_Die_of_dat.pptx
+++ b/neerlandais1/powerpoints/Module_22_Die_of_dat.pptx
@@ -133,18 +133,18 @@
   <p:extLst>
     <p:ext uri="{521415D9-36F7-43E2-AB2F-B90AF26B5E84}">
       <p14:sectionLst xmlns:p14="http://schemas.microsoft.com/office/powerpoint/2010/main">
-        <p14:section name="Ouverture" id="{b057ea0e-6b6e-c055-26d2-773aaa533613}">
+        <p14:section name="Ouverture" id="{d70303a8-6476-2a50-3a2b-e833572fef7e}">
           <p14:sldIdLst>
             <p14:sldId id="256"/>
           </p14:sldIdLst>
         </p14:section>
-        <p14:section name="Découvrir" id="{dc20cea6-cef5-b0bd-02ee-328bb42cd455}">
+        <p14:section name="Découvrir" id="{f5781ff6-2b3b-a6d4-b29a-8a6f50620ab6}">
           <p14:sldIdLst>
             <p14:sldId id="257"/>
             <p14:sldId id="258"/>
           </p14:sldIdLst>
         </p14:section>
-        <p14:section name="Comprendre" id="{6571900b-ab24-95f5-3895-c2d046377fef}">
+        <p14:section name="Comprendre" id="{467d9b48-e08a-88b8-de83-047f18c1de51}">
           <p14:sldIdLst>
             <p14:sldId id="259"/>
             <p14:sldId id="260"/>
@@ -158,7 +158,7 @@
             <p14:sldId id="268"/>
           </p14:sldIdLst>
         </p14:section>
-        <p14:section name="JIJ NU ! — Oefeningen" id="{2a1fbcfb-2969-89a6-2077-b77bfeb5ac28}">
+        <p14:section name="JIJ NU ! — Oefeningen" id="{55b4bc88-cec3-416f-dd85-f35687129080}">
           <p14:sldIdLst>
             <p14:sldId id="269"/>
             <p14:sldId id="270"/>
@@ -175,7 +175,7 @@
             <p14:sldId id="281"/>
           </p14:sldIdLst>
         </p14:section>
-        <p14:section name="Clôture" id="{be67e3b6-3163-80d7-f586-977203c652e9}">
+        <p14:section name="Clôture" id="{ed7f4177-22f9-0cc5-9a67-f813a272c42e}">
           <p14:sldIdLst>
             <p14:sldId id="282"/>
           </p14:sldIdLst>

--- a/neerlandais1/powerpoints/Module_22_Die_of_dat.pptx
+++ b/neerlandais1/powerpoints/Module_22_Die_of_dat.pptx
@@ -133,18 +133,18 @@
   <p:extLst>
     <p:ext uri="{521415D9-36F7-43E2-AB2F-B90AF26B5E84}">
       <p14:sectionLst xmlns:p14="http://schemas.microsoft.com/office/powerpoint/2010/main">
-        <p14:section name="Ouverture" id="{d70303a8-6476-2a50-3a2b-e833572fef7e}">
+        <p14:section name="Ouverture" id="{30a07636-7cae-32f3-6d6f-5d8a9efda53e}">
           <p14:sldIdLst>
             <p14:sldId id="256"/>
           </p14:sldIdLst>
         </p14:section>
-        <p14:section name="Découvrir" id="{f5781ff6-2b3b-a6d4-b29a-8a6f50620ab6}">
+        <p14:section name="Découvrir" id="{9e73ea8b-0f1c-b9eb-d662-175af86b8c3b}">
           <p14:sldIdLst>
             <p14:sldId id="257"/>
             <p14:sldId id="258"/>
           </p14:sldIdLst>
         </p14:section>
-        <p14:section name="Comprendre" id="{467d9b48-e08a-88b8-de83-047f18c1de51}">
+        <p14:section name="Comprendre" id="{5e48dc0a-56f1-4364-2440-19908c62882f}">
           <p14:sldIdLst>
             <p14:sldId id="259"/>
             <p14:sldId id="260"/>
@@ -158,7 +158,7 @@
             <p14:sldId id="268"/>
           </p14:sldIdLst>
         </p14:section>
-        <p14:section name="JIJ NU ! — Oefeningen" id="{55b4bc88-cec3-416f-dd85-f35687129080}">
+        <p14:section name="JIJ NU ! — Oefeningen" id="{ccad5c8d-20a8-40ba-6173-a6783b7fcc62}">
           <p14:sldIdLst>
             <p14:sldId id="269"/>
             <p14:sldId id="270"/>
@@ -175,7 +175,7 @@
             <p14:sldId id="281"/>
           </p14:sldIdLst>
         </p14:section>
-        <p14:section name="Clôture" id="{ed7f4177-22f9-0cc5-9a67-f813a272c42e}">
+        <p14:section name="Clôture" id="{3fcae681-b191-bca0-9a43-859c06b25f92}">
           <p14:sldIdLst>
             <p14:sldId id="282"/>
           </p14:sldIdLst>

--- a/neerlandais1/powerpoints/Module_22_Die_of_dat.pptx
+++ b/neerlandais1/powerpoints/Module_22_Die_of_dat.pptx
@@ -133,18 +133,18 @@
   <p:extLst>
     <p:ext uri="{521415D9-36F7-43E2-AB2F-B90AF26B5E84}">
       <p14:sectionLst xmlns:p14="http://schemas.microsoft.com/office/powerpoint/2010/main">
-        <p14:section name="Ouverture" id="{30a07636-7cae-32f3-6d6f-5d8a9efda53e}">
+        <p14:section name="Ouverture" id="{180d85e9-d0a8-3597-3485-9fce02a4311a}">
           <p14:sldIdLst>
             <p14:sldId id="256"/>
           </p14:sldIdLst>
         </p14:section>
-        <p14:section name="Découvrir" id="{9e73ea8b-0f1c-b9eb-d662-175af86b8c3b}">
+        <p14:section name="Découvrir" id="{6f11cad8-f6af-d091-7e31-f0d2eb10f65f}">
           <p14:sldIdLst>
             <p14:sldId id="257"/>
             <p14:sldId id="258"/>
           </p14:sldIdLst>
         </p14:section>
-        <p14:section name="Comprendre" id="{5e48dc0a-56f1-4364-2440-19908c62882f}">
+        <p14:section name="Comprendre" id="{2cc857b0-9a1e-bfb2-2258-924fa0b8e283}">
           <p14:sldIdLst>
             <p14:sldId id="259"/>
             <p14:sldId id="260"/>
@@ -158,7 +158,7 @@
             <p14:sldId id="268"/>
           </p14:sldIdLst>
         </p14:section>
-        <p14:section name="JIJ NU ! — Oefeningen" id="{ccad5c8d-20a8-40ba-6173-a6783b7fcc62}">
+        <p14:section name="JIJ NU ! — Oefeningen" id="{74260bfc-3bf1-7ea8-e324-77054c439c4b}">
           <p14:sldIdLst>
             <p14:sldId id="269"/>
             <p14:sldId id="270"/>
@@ -175,7 +175,7 @@
             <p14:sldId id="281"/>
           </p14:sldIdLst>
         </p14:section>
-        <p14:section name="Clôture" id="{3fcae681-b191-bca0-9a43-859c06b25f92}">
+        <p14:section name="Clôture" id="{6d331213-1fd5-68aa-d65e-318dd7049d31}">
           <p14:sldIdLst>
             <p14:sldId id="282"/>
           </p14:sldIdLst>
